--- a/Docs/meeting notes/0807aftermeeting.pptx
+++ b/Docs/meeting notes/0807aftermeeting.pptx
@@ -24,6 +24,7 @@
     <p:sldId id="280" r:id="rId18"/>
     <p:sldId id="281" r:id="rId19"/>
     <p:sldId id="282" r:id="rId20"/>
+    <p:sldId id="284" r:id="rId21"/>
   </p:sldIdLst>
   <p:sldSz cx="12192000" cy="6858000"/>
   <p:notesSz cx="6858000" cy="9144000"/>
@@ -154,6 +155,11 @@
             <p14:sldId id="280"/>
             <p14:sldId id="281"/>
             <p14:sldId id="282"/>
+          </p14:sldIdLst>
+        </p14:section>
+        <p14:section name="0814" id="{6456247A-DE7C-43D4-8E19-41186FEC560F}">
+          <p14:sldIdLst>
+            <p14:sldId id="284"/>
           </p14:sldIdLst>
         </p14:section>
       </p14:sectionLst>
@@ -546,7 +552,7 @@
           <a:p>
             <a:fld id="{6A1665DE-610D-4530-B0E8-1E86B60EE432}" type="datetimeFigureOut">
               <a:rPr lang="en-US" smtClean="0"/>
-              <a:t>8/7/2025</a:t>
+              <a:t>8/12/2025</a:t>
             </a:fld>
             <a:endParaRPr lang="en-US" dirty="0"/>
           </a:p>
@@ -744,7 +750,7 @@
           <a:p>
             <a:fld id="{6A1665DE-610D-4530-B0E8-1E86B60EE432}" type="datetimeFigureOut">
               <a:rPr lang="en-US" smtClean="0"/>
-              <a:t>8/7/2025</a:t>
+              <a:t>8/12/2025</a:t>
             </a:fld>
             <a:endParaRPr lang="en-US" dirty="0"/>
           </a:p>
@@ -952,7 +958,7 @@
           <a:p>
             <a:fld id="{6A1665DE-610D-4530-B0E8-1E86B60EE432}" type="datetimeFigureOut">
               <a:rPr lang="en-US" smtClean="0"/>
-              <a:t>8/7/2025</a:t>
+              <a:t>8/12/2025</a:t>
             </a:fld>
             <a:endParaRPr lang="en-US" dirty="0"/>
           </a:p>
@@ -1150,7 +1156,7 @@
           <a:p>
             <a:fld id="{6A1665DE-610D-4530-B0E8-1E86B60EE432}" type="datetimeFigureOut">
               <a:rPr lang="en-US" smtClean="0"/>
-              <a:t>8/7/2025</a:t>
+              <a:t>8/12/2025</a:t>
             </a:fld>
             <a:endParaRPr lang="en-US" dirty="0"/>
           </a:p>
@@ -1425,7 +1431,7 @@
           <a:p>
             <a:fld id="{6A1665DE-610D-4530-B0E8-1E86B60EE432}" type="datetimeFigureOut">
               <a:rPr lang="en-US" smtClean="0"/>
-              <a:t>8/7/2025</a:t>
+              <a:t>8/12/2025</a:t>
             </a:fld>
             <a:endParaRPr lang="en-US" dirty="0"/>
           </a:p>
@@ -1690,7 +1696,7 @@
           <a:p>
             <a:fld id="{6A1665DE-610D-4530-B0E8-1E86B60EE432}" type="datetimeFigureOut">
               <a:rPr lang="en-US" smtClean="0"/>
-              <a:t>8/7/2025</a:t>
+              <a:t>8/12/2025</a:t>
             </a:fld>
             <a:endParaRPr lang="en-US" dirty="0"/>
           </a:p>
@@ -2102,7 +2108,7 @@
           <a:p>
             <a:fld id="{6A1665DE-610D-4530-B0E8-1E86B60EE432}" type="datetimeFigureOut">
               <a:rPr lang="en-US" smtClean="0"/>
-              <a:t>8/7/2025</a:t>
+              <a:t>8/12/2025</a:t>
             </a:fld>
             <a:endParaRPr lang="en-US" dirty="0"/>
           </a:p>
@@ -2243,7 +2249,7 @@
           <a:p>
             <a:fld id="{6A1665DE-610D-4530-B0E8-1E86B60EE432}" type="datetimeFigureOut">
               <a:rPr lang="en-US" smtClean="0"/>
-              <a:t>8/7/2025</a:t>
+              <a:t>8/12/2025</a:t>
             </a:fld>
             <a:endParaRPr lang="en-US" dirty="0"/>
           </a:p>
@@ -2356,7 +2362,7 @@
           <a:p>
             <a:fld id="{6A1665DE-610D-4530-B0E8-1E86B60EE432}" type="datetimeFigureOut">
               <a:rPr lang="en-US" smtClean="0"/>
-              <a:t>8/7/2025</a:t>
+              <a:t>8/12/2025</a:t>
             </a:fld>
             <a:endParaRPr lang="en-US" dirty="0"/>
           </a:p>
@@ -2667,7 +2673,7 @@
           <a:p>
             <a:fld id="{6A1665DE-610D-4530-B0E8-1E86B60EE432}" type="datetimeFigureOut">
               <a:rPr lang="en-US" smtClean="0"/>
-              <a:t>8/7/2025</a:t>
+              <a:t>8/12/2025</a:t>
             </a:fld>
             <a:endParaRPr lang="en-US" dirty="0"/>
           </a:p>
@@ -2955,7 +2961,7 @@
           <a:p>
             <a:fld id="{6A1665DE-610D-4530-B0E8-1E86B60EE432}" type="datetimeFigureOut">
               <a:rPr lang="en-US" smtClean="0"/>
-              <a:t>8/7/2025</a:t>
+              <a:t>8/12/2025</a:t>
             </a:fld>
             <a:endParaRPr lang="en-US" dirty="0"/>
           </a:p>
@@ -3196,7 +3202,7 @@
           <a:p>
             <a:fld id="{6A1665DE-610D-4530-B0E8-1E86B60EE432}" type="datetimeFigureOut">
               <a:rPr lang="en-US" smtClean="0"/>
-              <a:t>8/7/2025</a:t>
+              <a:t>8/12/2025</a:t>
             </a:fld>
             <a:endParaRPr lang="en-US" dirty="0"/>
           </a:p>
@@ -4943,7 +4949,12 @@
             <p:ph type="title"/>
           </p:nvPr>
         </p:nvSpPr>
-        <p:spPr/>
+        <p:spPr>
+          <a:xfrm>
+            <a:off x="838200" y="277970"/>
+            <a:ext cx="10515600" cy="1325563"/>
+          </a:xfrm>
+        </p:spPr>
         <p:txBody>
           <a:bodyPr/>
           <a:lstStyle/>
@@ -5081,6 +5092,86 @@
     <p:extLst>
       <p:ext uri="{BB962C8B-B14F-4D97-AF65-F5344CB8AC3E}">
         <p14:creationId xmlns:p14="http://schemas.microsoft.com/office/powerpoint/2010/main" val="2739572051"/>
+      </p:ext>
+    </p:extLst>
+  </p:cSld>
+  <p:clrMapOvr>
+    <a:masterClrMapping/>
+  </p:clrMapOvr>
+</p:sld>
+</file>
+
+<file path=ppt/slides/slide20.xml><?xml version="1.0" encoding="utf-8"?>
+<p:sld xmlns:a="http://schemas.openxmlformats.org/drawingml/2006/main" xmlns:r="http://schemas.openxmlformats.org/officeDocument/2006/relationships" xmlns:p="http://schemas.openxmlformats.org/presentationml/2006/main">
+  <p:cSld>
+    <p:spTree>
+      <p:nvGrpSpPr>
+        <p:cNvPr id="1" name=""/>
+        <p:cNvGrpSpPr/>
+        <p:nvPr/>
+      </p:nvGrpSpPr>
+      <p:grpSpPr>
+        <a:xfrm>
+          <a:off x="0" y="0"/>
+          <a:ext cx="0" cy="0"/>
+          <a:chOff x="0" y="0"/>
+          <a:chExt cx="0" cy="0"/>
+        </a:xfrm>
+      </p:grpSpPr>
+      <p:sp>
+        <p:nvSpPr>
+          <p:cNvPr id="2" name="Title 1">
+            <a:extLst>
+              <a:ext uri="{FF2B5EF4-FFF2-40B4-BE49-F238E27FC236}">
+                <a16:creationId xmlns:a16="http://schemas.microsoft.com/office/drawing/2014/main" id="{FFFA5A83-FBEE-4421-C35A-54C2927639D7}"/>
+              </a:ext>
+            </a:extLst>
+          </p:cNvPr>
+          <p:cNvSpPr>
+            <a:spLocks noGrp="1"/>
+          </p:cNvSpPr>
+          <p:nvPr>
+            <p:ph type="title"/>
+          </p:nvPr>
+        </p:nvSpPr>
+        <p:spPr/>
+        <p:txBody>
+          <a:bodyPr/>
+          <a:lstStyle/>
+          <a:p>
+            <a:endParaRPr lang="en-US"/>
+          </a:p>
+        </p:txBody>
+      </p:sp>
+      <p:sp>
+        <p:nvSpPr>
+          <p:cNvPr id="3" name="Content Placeholder 2">
+            <a:extLst>
+              <a:ext uri="{FF2B5EF4-FFF2-40B4-BE49-F238E27FC236}">
+                <a16:creationId xmlns:a16="http://schemas.microsoft.com/office/drawing/2014/main" id="{03ADCF9C-1D51-CC9C-77B5-26B946BD08EE}"/>
+              </a:ext>
+            </a:extLst>
+          </p:cNvPr>
+          <p:cNvSpPr>
+            <a:spLocks noGrp="1"/>
+          </p:cNvSpPr>
+          <p:nvPr>
+            <p:ph idx="1"/>
+          </p:nvPr>
+        </p:nvSpPr>
+        <p:spPr/>
+        <p:txBody>
+          <a:bodyPr/>
+          <a:lstStyle/>
+          <a:p>
+            <a:endParaRPr lang="en-US"/>
+          </a:p>
+        </p:txBody>
+      </p:sp>
+    </p:spTree>
+    <p:extLst>
+      <p:ext uri="{BB962C8B-B14F-4D97-AF65-F5344CB8AC3E}">
+        <p14:creationId xmlns:p14="http://schemas.microsoft.com/office/powerpoint/2010/main" val="2394394161"/>
       </p:ext>
     </p:extLst>
   </p:cSld>
@@ -5785,8 +5876,8 @@
           </a:p>
         </p:txBody>
       </p:sp>
-      <mc:AlternateContent xmlns:mc="http://schemas.openxmlformats.org/markup-compatibility/2006">
-        <mc:Choice xmlns:p14="http://schemas.microsoft.com/office/powerpoint/2010/main" Requires="p14">
+      <mc:AlternateContent xmlns:mc="http://schemas.openxmlformats.org/markup-compatibility/2006" xmlns:p14="http://schemas.microsoft.com/office/powerpoint/2010/main">
+        <mc:Choice Requires="p14">
           <p:contentPart p14:bwMode="auto" r:id="rId4">
             <p14:nvContentPartPr>
               <p14:cNvPr id="2" name="Ink 1">
@@ -5805,7 +5896,7 @@
             </p14:xfrm>
           </p:contentPart>
         </mc:Choice>
-        <mc:Fallback>
+        <mc:Fallback xmlns="">
           <p:pic>
             <p:nvPicPr>
               <p:cNvPr id="2" name="Ink 1">
@@ -6438,8 +6529,8 @@
           </a:prstGeom>
         </p:spPr>
       </p:pic>
-      <mc:AlternateContent xmlns:mc="http://schemas.openxmlformats.org/markup-compatibility/2006">
-        <mc:Choice xmlns:p14="http://schemas.microsoft.com/office/powerpoint/2010/main" Requires="p14">
+      <mc:AlternateContent xmlns:mc="http://schemas.openxmlformats.org/markup-compatibility/2006" xmlns:p14="http://schemas.microsoft.com/office/powerpoint/2010/main">
+        <mc:Choice Requires="p14">
           <p:contentPart p14:bwMode="auto" r:id="rId6">
             <p14:nvContentPartPr>
               <p14:cNvPr id="2" name="Ink 1">
@@ -6458,7 +6549,7 @@
             </p14:xfrm>
           </p:contentPart>
         </mc:Choice>
-        <mc:Fallback>
+        <mc:Fallback xmlns="">
           <p:pic>
             <p:nvPicPr>
               <p:cNvPr id="2" name="Ink 1">
